--- a/App Deployment.pptx
+++ b/App Deployment.pptx
@@ -4227,7 +4227,7 @@
                 <a:latin typeface="D2Coding" panose="020B0609020101020101" pitchFamily="49" charset="-127"/>
                 <a:ea typeface="D2Coding" panose="020B0609020101020101" pitchFamily="49" charset="-127"/>
               </a:rPr>
-              <a:t>App Deployment</a:t>
+              <a:t>Application Deployment</a:t>
             </a:r>
             <a:br>
               <a:rPr lang="en-US" altLang="ko-KR" sz="5400" dirty="0">
@@ -37608,8 +37608,8 @@
         </p:nvSpPr>
         <p:spPr>
           <a:xfrm>
-            <a:off x="998535" y="1618270"/>
-            <a:ext cx="10669590" cy="4931030"/>
+            <a:off x="2513299" y="1802604"/>
+            <a:ext cx="6861610" cy="3738396"/>
           </a:xfrm>
           <a:prstGeom prst="rect">
             <a:avLst/>
@@ -37624,7 +37624,7 @@
           <a:p>
             <a:pPr marL="342900" indent="-342900">
               <a:lnSpc>
-                <a:spcPct val="200000"/>
+                <a:spcPct val="150000"/>
               </a:lnSpc>
               <a:buFont typeface="+mj-lt"/>
               <a:buAutoNum type="arabicPeriod"/>
@@ -37668,7 +37668,7 @@
           <a:p>
             <a:pPr marL="342900" indent="-342900">
               <a:lnSpc>
-                <a:spcPct val="200000"/>
+                <a:spcPct val="150000"/>
               </a:lnSpc>
               <a:buFont typeface="+mj-lt"/>
               <a:buAutoNum type="arabicPeriod"/>
@@ -37684,7 +37684,7 @@
           <a:p>
             <a:pPr marL="342900" indent="-342900">
               <a:lnSpc>
-                <a:spcPct val="200000"/>
+                <a:spcPct val="150000"/>
               </a:lnSpc>
               <a:buFont typeface="+mj-lt"/>
               <a:buAutoNum type="arabicPeriod"/>
@@ -37700,7 +37700,7 @@
           <a:p>
             <a:pPr marL="342900" indent="-342900">
               <a:lnSpc>
-                <a:spcPct val="200000"/>
+                <a:spcPct val="150000"/>
               </a:lnSpc>
               <a:buFont typeface="+mj-lt"/>
               <a:buAutoNum type="arabicPeriod"/>
@@ -37730,7 +37730,7 @@
           <a:p>
             <a:pPr marL="342900" indent="-342900">
               <a:lnSpc>
-                <a:spcPct val="200000"/>
+                <a:spcPct val="150000"/>
               </a:lnSpc>
               <a:buFont typeface="+mj-lt"/>
               <a:buAutoNum type="arabicPeriod"/>
@@ -37746,7 +37746,7 @@
           <a:p>
             <a:pPr marL="342900" indent="-342900">
               <a:lnSpc>
-                <a:spcPct val="200000"/>
+                <a:spcPct val="150000"/>
               </a:lnSpc>
               <a:buFont typeface="+mj-lt"/>
               <a:buAutoNum type="arabicPeriod"/>
@@ -37762,7 +37762,7 @@
           <a:p>
             <a:pPr marL="342900" indent="-342900">
               <a:lnSpc>
-                <a:spcPct val="200000"/>
+                <a:spcPct val="150000"/>
               </a:lnSpc>
               <a:buFont typeface="+mj-lt"/>
               <a:buAutoNum type="arabicPeriod"/>
@@ -37785,7 +37785,7 @@
           <a:p>
             <a:pPr marL="342900" indent="-342900">
               <a:lnSpc>
-                <a:spcPct val="200000"/>
+                <a:spcPct val="150000"/>
               </a:lnSpc>
               <a:buFont typeface="+mj-lt"/>
               <a:buAutoNum type="arabicPeriod"/>
